--- a/P_02/WBS_2.pptx
+++ b/P_02/WBS_2.pptx
@@ -4232,7 +4232,7 @@
           <a:lstStyle/>
           <a:p>
             <a:r>
-              <a:rPr lang="en-US" sz="1200" b="1" dirty="0">
+              <a:rPr lang="en-US" sz="1200" b="1">
                 <a:highlight>
                   <a:srgbClr val="FFFFFF"/>
                 </a:highlight>
@@ -4241,21 +4241,6 @@
               </a:rPr>
               <a:t>Data Limitation</a:t>
             </a:r>
-            <a:r>
-              <a:rPr lang="en-US" sz="1200" dirty="0">
-                <a:highlight>
-                  <a:srgbClr val="FFFFFF"/>
-                </a:highlight>
-                <a:latin typeface="Aptos"/>
-                <a:cs typeface="Arial"/>
-              </a:rPr>
-              <a:t>: </a:t>
-            </a:r>
-            <a:endParaRPr lang="pl-PL">
-              <a:cs typeface="Arial"/>
-            </a:endParaRPr>
-          </a:p>
-          <a:p>
             <a:r>
               <a:rPr lang="en-US" sz="1200">
                 <a:highlight>
@@ -4264,7 +4249,7 @@
                 <a:latin typeface="Aptos"/>
                 <a:cs typeface="Arial"/>
               </a:rPr>
-              <a:t>Due to the analysis being focused on a single-hour snapshot,</a:t>
+              <a:t>: </a:t>
             </a:r>
             <a:endParaRPr lang="pl-PL">
               <a:cs typeface="Arial"/>
@@ -4279,7 +4264,7 @@
                 <a:latin typeface="Aptos"/>
                 <a:cs typeface="Arial"/>
               </a:rPr>
-              <a:t>long-term retention trends and cohort behaviors</a:t>
+              <a:t>Due to the analysis being focused on a single-hour snapshot,</a:t>
             </a:r>
             <a:endParaRPr lang="pl-PL">
               <a:cs typeface="Arial"/>
@@ -4287,7 +4272,22 @@
           </a:p>
           <a:p>
             <a:r>
-              <a:rPr lang="en-US" sz="1200" dirty="0">
+              <a:rPr lang="en-US" sz="1200">
+                <a:highlight>
+                  <a:srgbClr val="FFFFFF"/>
+                </a:highlight>
+                <a:latin typeface="Aptos"/>
+                <a:cs typeface="Arial"/>
+              </a:rPr>
+              <a:t>long-term retention trends and cohort behaviors</a:t>
+            </a:r>
+            <a:endParaRPr lang="pl-PL">
+              <a:cs typeface="Arial"/>
+            </a:endParaRPr>
+          </a:p>
+          <a:p>
+            <a:r>
+              <a:rPr lang="en-US" sz="1200">
                 <a:highlight>
                   <a:srgbClr val="FFFFFF"/>
                 </a:highlight>
@@ -4501,7 +4501,7 @@
               </a:rPr>
               <a:t>. </a:t>
             </a:r>
-            <a:endParaRPr lang="en-US" sz="1200" dirty="0"/>
+            <a:endParaRPr lang="en-US" sz="1200"/>
           </a:p>
           <a:p>
             <a:r>
@@ -4560,7 +4560,7 @@
               </a:rPr>
               <a:t> of total revenue. </a:t>
             </a:r>
-            <a:endParaRPr lang="en-US" sz="1200" dirty="0"/>
+            <a:endParaRPr lang="en-US" sz="1200"/>
           </a:p>
           <a:p>
             <a:r>
@@ -4619,7 +4619,7 @@
               </a:rPr>
               <a:t>) and higher conversion power. </a:t>
             </a:r>
-            <a:endParaRPr lang="en-US" sz="1200" dirty="0"/>
+            <a:endParaRPr lang="en-US" sz="1200"/>
           </a:p>
           <a:p>
             <a:r>
@@ -4650,13 +4650,13 @@
               </a:rPr>
               <a:t> of users leaving before viewing a product. </a:t>
             </a:r>
-            <a:endParaRPr lang="en-US" sz="1200" dirty="0"/>
+            <a:endParaRPr lang="en-US" sz="1200"/>
           </a:p>
           <a:p>
             <a:pPr marL="0" indent="0">
               <a:buNone/>
             </a:pPr>
-            <a:endParaRPr lang="en-US" sz="1400" b="1" dirty="0">
+            <a:endParaRPr lang="en-US" sz="1400" b="1">
               <a:ea typeface="+mn-lt"/>
               <a:cs typeface="+mn-lt"/>
             </a:endParaRPr>
@@ -4697,18 +4697,11 @@
               <a:t>142 active users</a:t>
             </a:r>
             <a:r>
-              <a:rPr lang="en-US" sz="1200" dirty="0">
-                <a:ea typeface="+mn-lt"/>
-                <a:cs typeface="+mn-lt"/>
-              </a:rPr>
-              <a:t> </a:t>
-            </a:r>
-            <a:r>
               <a:rPr lang="en-US" sz="1200">
                 <a:ea typeface="+mn-lt"/>
                 <a:cs typeface="+mn-lt"/>
               </a:rPr>
-              <a:t>generated </a:t>
+              <a:t> generated </a:t>
             </a:r>
             <a:r>
               <a:rPr lang="en-US" sz="1200" b="1">
@@ -4738,7 +4731,7 @@
               </a:rPr>
               <a:t> users. </a:t>
             </a:r>
-            <a:endParaRPr lang="en-US" sz="1200" dirty="0"/>
+            <a:endParaRPr lang="en-US" sz="1200"/>
           </a:p>
           <a:p>
             <a:r>
@@ -4797,7 +4790,7 @@
               </a:rPr>
               <a:t> yield the highest conversion quality. </a:t>
             </a:r>
-            <a:endParaRPr lang="en-US" sz="1200" dirty="0"/>
+            <a:endParaRPr lang="en-US" sz="1200"/>
           </a:p>
           <a:p>
             <a:r>
@@ -4822,18 +4815,11 @@
               <a:t>New Arrivals</a:t>
             </a:r>
             <a:r>
-              <a:rPr lang="en-US" sz="1200" dirty="0">
-                <a:ea typeface="+mn-lt"/>
-                <a:cs typeface="+mn-lt"/>
-              </a:rPr>
-              <a:t> </a:t>
-            </a:r>
-            <a:r>
               <a:rPr lang="en-US" sz="1200">
                 <a:ea typeface="+mn-lt"/>
                 <a:cs typeface="+mn-lt"/>
               </a:rPr>
-              <a:t>and </a:t>
+              <a:t> and </a:t>
             </a:r>
             <a:r>
               <a:rPr lang="en-US" sz="1200" b="1">
@@ -4849,13 +4835,13 @@
               </a:rPr>
               <a:t> , though hourly sales were limited to small accessories like mugs and keychains. </a:t>
             </a:r>
-            <a:endParaRPr lang="en-US" sz="1200" dirty="0"/>
+            <a:endParaRPr lang="en-US" sz="1200"/>
           </a:p>
           <a:p>
             <a:pPr marL="0" indent="0">
               <a:buNone/>
             </a:pPr>
-            <a:endParaRPr lang="en-US" sz="1200" dirty="0">
+            <a:endParaRPr lang="en-US" sz="1200">
               <a:ea typeface="+mn-lt"/>
               <a:cs typeface="+mn-lt"/>
             </a:endParaRPr>
@@ -4875,23 +4861,23 @@
           </a:p>
           <a:p>
             <a:r>
-              <a:rPr lang="en-US" sz="1200" b="1" dirty="0">
+              <a:rPr lang="en-US" sz="1200" b="1">
                 <a:ea typeface="+mn-lt"/>
                 <a:cs typeface="+mn-lt"/>
               </a:rPr>
               <a:t>Mobile Optimization</a:t>
             </a:r>
             <a:r>
-              <a:rPr lang="en-US" sz="1200" dirty="0">
+              <a:rPr lang="en-US" sz="1200">
                 <a:ea typeface="+mn-lt"/>
                 <a:cs typeface="+mn-lt"/>
               </a:rPr>
               <a:t>: High mobile traffic fails to convert effectively; urgent need to streamline the mobile checkout path. </a:t>
             </a:r>
-            <a:endParaRPr lang="en-US" sz="1200" dirty="0"/>
-          </a:p>
-          <a:p>
-            <a:endParaRPr lang="en-US" sz="1200" dirty="0"/>
+            <a:endParaRPr lang="en-US" sz="1200"/>
+          </a:p>
+          <a:p>
+            <a:endParaRPr lang="en-US" sz="1200"/>
           </a:p>
         </p:txBody>
       </p:sp>
